--- a/2.Texto/Imag/diagrama_navegacion_autonoma.pptx
+++ b/2.Texto/Imag/diagrama_navegacion_autonoma.pptx
@@ -4616,7 +4616,7 @@
                 </a:solidFill>
                 <a:latin typeface="Calibri"/>
               </a:rPr>
-              <a:t>PID por rueda</a:t>
+              <a:t>PI incremental por rueda</a:t>
             </a:r>
           </a:p>
           <a:p>
